--- a/生成的课件/11_管理经济学_第11章_全球化背景下的企业经营决策.pptx
+++ b/生成的课件/11_管理经济学_第11章_全球化背景下的企业经营决策.pptx
@@ -4006,7 +4006,7 @@
                 <a:latin typeface="Times New Roman"/>
                 <a:ea typeface="宋体"/>
               </a:rPr>
-              <a:t>  1. 结算货币选择与提前/延期结汇（Leading and Lagging）</a:t>
+              <a:t>1. 结算货币选择与提前/延期结汇（Leading and Lagging）</a:t>
             </a:r>
           </a:p>
         </p:txBody>
@@ -4049,7 +4049,7 @@
                 <a:latin typeface="Times New Roman"/>
                 <a:ea typeface="宋体"/>
               </a:rPr>
-              <a:t>（1）货币篮子选择策略： </a:t>
+              <a:t>（1）货币篮子选择策略：</a:t>
             </a:r>
             <a:r>
               <a:rPr sz="1250" b="0">
@@ -4079,7 +4079,7 @@
                 <a:latin typeface="Times New Roman"/>
                 <a:ea typeface="宋体"/>
               </a:rPr>
-              <a:t>（2）提前结汇（Leading）： </a:t>
+              <a:t>（2）提前结汇（Leading）：</a:t>
             </a:r>
             <a:r>
               <a:rPr sz="1250" b="0">
@@ -4109,7 +4109,7 @@
                 <a:latin typeface="Times New Roman"/>
                 <a:ea typeface="宋体"/>
               </a:rPr>
-              <a:t>（3）延期结汇（Lagging）： </a:t>
+              <a:t>（3）延期结汇（Lagging）：</a:t>
             </a:r>
             <a:r>
               <a:rPr sz="1250" b="0">
@@ -4219,7 +4219,7 @@
                 <a:latin typeface="Times New Roman"/>
                 <a:ea typeface="宋体"/>
               </a:rPr>
-              <a:t>  2. 跨国资金池（Global Cash Pooling）与内部净额对冲</a:t>
+              <a:t>2. 跨国资金池（Global Cash Pooling）与内部净额对冲</a:t>
             </a:r>
           </a:p>
         </p:txBody>
@@ -4262,7 +4262,7 @@
                 <a:latin typeface="Times New Roman"/>
                 <a:ea typeface="宋体"/>
               </a:rPr>
-              <a:t>（1）内部轧差（Netting）： </a:t>
+              <a:t>（1）内部轧差（Netting）：</a:t>
             </a:r>
             <a:r>
               <a:rPr sz="1250" b="0">
@@ -4329,7 +4329,7 @@
                 <a:latin typeface="Times New Roman"/>
                 <a:ea typeface="宋体"/>
               </a:rPr>
-              <a:t>  ★ 核心要点：操作性外汇管理工具与金融衍生品双轨并进，打造跨国企业立体抗汇率波动防御网。</a:t>
+              <a:t>★ 核心要点：操作性外汇管理工具与金融衍生品双轨并进，打造跨国企业立体抗汇率波动防御网。</a:t>
             </a:r>
           </a:p>
         </p:txBody>
@@ -5067,7 +5067,7 @@
                 <a:latin typeface="Times New Roman"/>
                 <a:ea typeface="宋体"/>
               </a:rPr>
-              <a:t>  关税价格效应与社会福利净损失</a:t>
+              <a:t>关税价格效应与社会福利净损失</a:t>
             </a:r>
           </a:p>
         </p:txBody>
@@ -5110,7 +5110,7 @@
                 <a:latin typeface="Times New Roman"/>
                 <a:ea typeface="宋体"/>
               </a:rPr>
-              <a:t>（1）自由贸易基准： </a:t>
+              <a:t>（1）自由贸易基准：</a:t>
             </a:r>
             <a:r>
               <a:rPr sz="1100" b="0">
@@ -5120,7 +5120,7 @@
                 <a:latin typeface="Times New Roman"/>
                 <a:ea typeface="宋体"/>
               </a:rPr>
-              <a:t>世界价格为 P_w，国内产量为 Q_1，国内消费为 Q_2，进口量为 Q_2 - Q_1。</a:t>
+              <a:t>世界价格为 Pw，国内产量为 Q₁，国内消费为 Q₂，进口量为 Q₂ - Q₁。</a:t>
             </a:r>
           </a:p>
           <a:p>
@@ -5140,7 +5140,7 @@
                 <a:latin typeface="Times New Roman"/>
                 <a:ea typeface="宋体"/>
               </a:rPr>
-              <a:t>（2）征收进口关税 t 后： </a:t>
+              <a:t>（2）征收进口关税 t 后：</a:t>
             </a:r>
             <a:r>
               <a:rPr sz="1100" b="0">
@@ -5150,7 +5150,7 @@
                 <a:latin typeface="Times New Roman"/>
                 <a:ea typeface="宋体"/>
               </a:rPr>
-              <a:t>国内价格抬升至 P_t = P_w + t，刺激国内低效生产增至 Q_3，抑制国内消费降至 Q_4，进口萎缩至 Q_4 - Q_3。</a:t>
+              <a:t>国内价格抬升至 Pₜ = Pw + t，刺激国内低效生产增至 Q₃，抑制国内消费降至 Q₄，进口萎缩至 Q₄ - Q₃。</a:t>
             </a:r>
           </a:p>
           <a:p>
@@ -5170,7 +5170,7 @@
                 <a:latin typeface="Times New Roman"/>
                 <a:ea typeface="宋体"/>
               </a:rPr>
-              <a:t>（3）消费者剩余损失分解 (a + b + c + d)： </a:t>
+              <a:t>（3）消费者剩余损失分解 (a + b + c + d)：</a:t>
             </a:r>
             <a:r>
               <a:rPr sz="1100" b="0">
@@ -5200,7 +5200,7 @@
                 <a:latin typeface="Times New Roman"/>
                 <a:ea typeface="宋体"/>
               </a:rPr>
-              <a:t>   • 梯形 a： </a:t>
+              <a:t>• 梯形 a：</a:t>
             </a:r>
             <a:r>
               <a:rPr sz="1100" b="0">
@@ -5230,7 +5230,7 @@
                 <a:latin typeface="Times New Roman"/>
                 <a:ea typeface="宋体"/>
               </a:rPr>
-              <a:t>   • 矩形 c： </a:t>
+              <a:t>• 矩形 c：</a:t>
             </a:r>
             <a:r>
               <a:rPr sz="1100" b="0">
@@ -5240,7 +5240,7 @@
                 <a:latin typeface="Times New Roman"/>
                 <a:ea typeface="宋体"/>
               </a:rPr>
-              <a:t>政府征收的关税财政税收收入 (t \times 进口量)。</a:t>
+              <a:t>政府征收的关税财政税收收入 (t × 进口量)。</a:t>
             </a:r>
           </a:p>
           <a:p>
@@ -5260,7 +5260,7 @@
                 <a:latin typeface="Times New Roman"/>
                 <a:ea typeface="宋体"/>
               </a:rPr>
-              <a:t>   • 三角形 b（生产扭曲死重损失 DWL_1）： </a:t>
+              <a:t>• 三角形 b（生产扭曲死重损失 DWL₁）：</a:t>
             </a:r>
             <a:r>
               <a:rPr sz="1100" b="0">
@@ -5290,7 +5290,7 @@
                 <a:latin typeface="Times New Roman"/>
                 <a:ea typeface="宋体"/>
               </a:rPr>
-              <a:t>   • 三角形 d（消费扭曲死重损失 DWL_2）： </a:t>
+              <a:t>• 三角形 d（消费扭曲死重损失 DWL₂）：</a:t>
             </a:r>
             <a:r>
               <a:rPr sz="1100" b="0">
@@ -5357,7 +5357,7 @@
                 <a:latin typeface="Times New Roman"/>
                 <a:ea typeface="宋体"/>
               </a:rPr>
-              <a:t>  ★ 理论精要：关税保护实质是以全社会净福利死重损失（b+d）和消费者福利受损为代价，向特定低效受保护利益集团输送租金。</a:t>
+              <a:t>★ 理论精要：关税保护实质是以全社会净福利死重损失（b+d）和消费者福利受损为代价，向特定低效受保护利益集团输送租金。</a:t>
             </a:r>
           </a:p>
         </p:txBody>
@@ -5764,7 +5764,7 @@
                 <a:latin typeface="Times New Roman"/>
                 <a:ea typeface="宋体"/>
               </a:rPr>
-              <a:t>  1. 进口配额（Import Quotas）的经济效应与租金归属</a:t>
+              <a:t>1. 进口配额（Import Quotas）的经济效应与租金归属</a:t>
             </a:r>
           </a:p>
         </p:txBody>
@@ -5807,7 +5807,7 @@
                 <a:latin typeface="Times New Roman"/>
                 <a:ea typeface="宋体"/>
               </a:rPr>
-              <a:t>（1）配额限制机制： </a:t>
+              <a:t>（1）配额限制机制：</a:t>
             </a:r>
             <a:r>
               <a:rPr sz="1250" b="0">
@@ -5837,7 +5837,7 @@
                 <a:latin typeface="Times New Roman"/>
                 <a:ea typeface="宋体"/>
               </a:rPr>
-              <a:t>（2）配额与关税对比： </a:t>
+              <a:t>（2）配额与关税对比：</a:t>
             </a:r>
             <a:r>
               <a:rPr sz="1250" b="0">
@@ -5867,7 +5867,7 @@
                 <a:latin typeface="Times New Roman"/>
                 <a:ea typeface="宋体"/>
               </a:rPr>
-              <a:t>（3）配额租金（Quota Rents）三种流向： </a:t>
+              <a:t>（3）配额租金（Quota Rents）三种流向：</a:t>
             </a:r>
             <a:r>
               <a:rPr sz="1250" b="0">
@@ -5877,7 +5877,7 @@
                 <a:latin typeface="Times New Roman"/>
                 <a:ea typeface="宋体"/>
               </a:rPr>
-              <a:t>① 政府公开拍卖许可证 \to 归国库；② 免费分配给特定代理商 \to 成为进口商暴利；③ 出口国自愿配额 \to 拱手送给外国出口商。</a:t>
+              <a:t>① 政府公开拍卖许可证 → 归国库；② 免费分配给特定代理商 → 成为进口商暴利；③ 出口国自愿配额 → 拱手送给外国出口商。</a:t>
             </a:r>
           </a:p>
         </p:txBody>
@@ -5977,7 +5977,7 @@
                 <a:latin typeface="Times New Roman"/>
                 <a:ea typeface="宋体"/>
               </a:rPr>
-              <a:t>  2. 寻租腐败与非关税技术壁垒</a:t>
+              <a:t>2. 寻租腐败与非关税技术壁垒</a:t>
             </a:r>
           </a:p>
         </p:txBody>
@@ -6020,7 +6020,7 @@
                 <a:latin typeface="Times New Roman"/>
                 <a:ea typeface="宋体"/>
               </a:rPr>
-              <a:t>（1）寻租行为（Rent-Seeking）： </a:t>
+              <a:t>（1）寻租行为（Rent-Seeking）：</a:t>
             </a:r>
             <a:r>
               <a:rPr sz="1250" b="0">
@@ -6050,7 +6050,7 @@
                 <a:latin typeface="Times New Roman"/>
                 <a:ea typeface="宋体"/>
               </a:rPr>
-              <a:t>（2）自愿出口限制（VER）与技术性贸易壁垒（TBT）： </a:t>
+              <a:t>（2）自愿出口限制（VER）与技术性贸易壁垒（TBT）：</a:t>
             </a:r>
             <a:r>
               <a:rPr sz="1250" b="0">
@@ -6117,7 +6117,7 @@
                 <a:latin typeface="Times New Roman"/>
                 <a:ea typeface="宋体"/>
               </a:rPr>
-              <a:t>  ★ 核心要点：非关税壁垒与配额寻租加剧了市场扭曲，出海企业必须高度重视东道国非关税合规风险。</a:t>
+              <a:t>★ 核心要点：非关税壁垒与配额寻租加剧了市场扭曲，出海企业必须高度重视东道国非关税合规风险。</a:t>
             </a:r>
           </a:p>
         </p:txBody>
@@ -6524,7 +6524,7 @@
                 <a:latin typeface="Times New Roman"/>
                 <a:ea typeface="宋体"/>
               </a:rPr>
-              <a:t>  1. 区域自由贸易协定（FTA / 关税同盟）</a:t>
+              <a:t>1. 区域自由贸易协定（FTA / 关税同盟）</a:t>
             </a:r>
           </a:p>
         </p:txBody>
@@ -6567,7 +6567,7 @@
                 <a:latin typeface="Times New Roman"/>
                 <a:ea typeface="宋体"/>
               </a:rPr>
-              <a:t>（1）运作机制： </a:t>
+              <a:t>（1）运作机制：</a:t>
             </a:r>
             <a:r>
               <a:rPr sz="1250" b="0">
@@ -6597,7 +6597,7 @@
                 <a:latin typeface="Times New Roman"/>
                 <a:ea typeface="宋体"/>
               </a:rPr>
-              <a:t>（2）原产地累积规则： </a:t>
+              <a:t>（2）原产地累积规则：</a:t>
             </a:r>
             <a:r>
               <a:rPr sz="1250" b="0">
@@ -6707,7 +6707,7 @@
                 <a:latin typeface="Times New Roman"/>
                 <a:ea typeface="宋体"/>
               </a:rPr>
-              <a:t>  2. 瓦伊纳（Viner）关税同盟两大福利效应</a:t>
+              <a:t>2. 瓦伊纳（Viner）关税同盟两大福利效应</a:t>
             </a:r>
           </a:p>
         </p:txBody>
@@ -6750,7 +6750,7 @@
                 <a:latin typeface="Times New Roman"/>
                 <a:ea typeface="宋体"/>
               </a:rPr>
-              <a:t>（1）贸易创造效应（Trade Creation / 福利增加）： </a:t>
+              <a:t>（1）贸易创造效应（Trade Creation / 福利增加）：</a:t>
             </a:r>
             <a:r>
               <a:rPr sz="1250" b="0">
@@ -6780,7 +6780,7 @@
                 <a:latin typeface="Times New Roman"/>
                 <a:ea typeface="宋体"/>
               </a:rPr>
-              <a:t>（2）贸易转移效应（Trade Diversion / 福利损失）： </a:t>
+              <a:t>（2）贸易转移效应（Trade Diversion / 福利损失）：</a:t>
             </a:r>
             <a:r>
               <a:rPr sz="1250" b="0">
@@ -6847,7 +6847,7 @@
                 <a:latin typeface="Times New Roman"/>
                 <a:ea typeface="宋体"/>
               </a:rPr>
-              <a:t>  ★ 核心要点：企业跨国布局应优先锚定高标准自由贸易协定（FTA）成员国网络，最大化享受零关税与通关便利。</a:t>
+              <a:t>★ 核心要点：企业跨国布局应优先锚定高标准自由贸易协定（FTA）成员国网络，最大化享受零关税与通关便利。</a:t>
             </a:r>
           </a:p>
         </p:txBody>
@@ -7254,7 +7254,7 @@
                 <a:latin typeface="Times New Roman"/>
                 <a:ea typeface="宋体"/>
               </a:rPr>
-              <a:t>  1. WTO 反倾销法理判定三大要件</a:t>
+              <a:t>1. WTO 反倾销法理判定三大要件</a:t>
             </a:r>
           </a:p>
         </p:txBody>
@@ -7297,7 +7297,7 @@
                 <a:latin typeface="Times New Roman"/>
                 <a:ea typeface="宋体"/>
               </a:rPr>
-              <a:t>（1）倾销事实判定： </a:t>
+              <a:t>（1）倾销事实判定：</a:t>
             </a:r>
             <a:r>
               <a:rPr sz="1250" b="0">
@@ -7327,7 +7327,7 @@
                 <a:latin typeface="Times New Roman"/>
                 <a:ea typeface="宋体"/>
               </a:rPr>
-              <a:t>（2）实质损害判定： </a:t>
+              <a:t>（2）实质损害判定：</a:t>
             </a:r>
             <a:r>
               <a:rPr sz="1250" b="0">
@@ -7357,7 +7357,7 @@
                 <a:latin typeface="Times New Roman"/>
                 <a:ea typeface="宋体"/>
               </a:rPr>
-              <a:t>（3）因果关系判定： </a:t>
+              <a:t>（3）因果关系判定：</a:t>
             </a:r>
             <a:r>
               <a:rPr sz="1250" b="0">
@@ -7467,7 +7467,7 @@
                 <a:latin typeface="Times New Roman"/>
                 <a:ea typeface="宋体"/>
               </a:rPr>
-              <a:t>  2. 出海企业的合规抗辩与规避路径</a:t>
+              <a:t>2. 出海企业的合规抗辩与规避路径</a:t>
             </a:r>
           </a:p>
         </p:txBody>
@@ -7510,7 +7510,7 @@
                 <a:latin typeface="Times New Roman"/>
                 <a:ea typeface="宋体"/>
               </a:rPr>
-              <a:t>（1）建立合规成本会计体系： </a:t>
+              <a:t>（1）建立合规成本会计体系：</a:t>
             </a:r>
             <a:r>
               <a:rPr sz="1250" b="0">
@@ -7540,7 +7540,7 @@
                 <a:latin typeface="Times New Roman"/>
                 <a:ea typeface="宋体"/>
               </a:rPr>
-              <a:t>（2）海外本土化 FDI 规避壁垒： </a:t>
+              <a:t>（2）海外本土化 FDI 规避壁垒：</a:t>
             </a:r>
             <a:r>
               <a:rPr sz="1250" b="0">
@@ -7607,7 +7607,7 @@
                 <a:latin typeface="Times New Roman"/>
                 <a:ea typeface="宋体"/>
               </a:rPr>
-              <a:t>  ★ 核心要点：反倾销是国际贸易战中最常见的合法性保护武器，企业必须强化国际法务抗辩与全球产能多元化配置。</a:t>
+              <a:t>★ 核心要点：反倾销是国际贸易战中最常见的合法性保护武器，企业必须强化国际法务抗辩与全球产能多元化配置。</a:t>
             </a:r>
           </a:p>
         </p:txBody>
@@ -8321,7 +8321,7 @@
                 <a:latin typeface="Times New Roman"/>
                 <a:ea typeface="宋体"/>
               </a:rPr>
-              <a:t>  1. OLI 理论三大核心优势支柱</a:t>
+              <a:t>1. OLI 理论三大核心优势支柱</a:t>
             </a:r>
           </a:p>
         </p:txBody>
@@ -8364,7 +8364,7 @@
                 <a:latin typeface="Times New Roman"/>
                 <a:ea typeface="宋体"/>
               </a:rPr>
-              <a:t>（1）所有权特定优势（Ownership, O）： </a:t>
+              <a:t>（1）所有权特定优势（Ownership, O）：</a:t>
             </a:r>
             <a:r>
               <a:rPr sz="1250" b="0">
@@ -8394,7 +8394,7 @@
                 <a:latin typeface="Times New Roman"/>
                 <a:ea typeface="宋体"/>
               </a:rPr>
-              <a:t>（2）内部化优势（Internalization, I）： </a:t>
+              <a:t>（2）内部化优势（Internalization, I）：</a:t>
             </a:r>
             <a:r>
               <a:rPr sz="1250" b="0">
@@ -8424,7 +8424,7 @@
                 <a:latin typeface="Times New Roman"/>
                 <a:ea typeface="宋体"/>
               </a:rPr>
-              <a:t>（3）区位特定优势（Location, L）： </a:t>
+              <a:t>（3）区位特定优势（Location, L）：</a:t>
             </a:r>
             <a:r>
               <a:rPr sz="1250" b="0">
@@ -8534,7 +8534,7 @@
                 <a:latin typeface="Times New Roman"/>
                 <a:ea typeface="宋体"/>
               </a:rPr>
-              <a:t>  2. FDI 决策三维逻辑判定矩阵</a:t>
+              <a:t>2. FDI 决策三维逻辑判定矩阵</a:t>
             </a:r>
           </a:p>
         </p:txBody>
@@ -8577,7 +8577,7 @@
                 <a:latin typeface="Times New Roman"/>
                 <a:ea typeface="宋体"/>
               </a:rPr>
-              <a:t>（1）仅具备所有权优势 (O)： </a:t>
+              <a:t>（1）仅具备所有权优势 (O)：</a:t>
             </a:r>
             <a:r>
               <a:rPr sz="1250" b="0">
@@ -8607,7 +8607,7 @@
                 <a:latin typeface="Times New Roman"/>
                 <a:ea typeface="宋体"/>
               </a:rPr>
-              <a:t>（2）具备所有权优势 (O) + 内部化优势 (I)： </a:t>
+              <a:t>（2）具备所有权优势 (O) + 内部化优势 (I)：</a:t>
             </a:r>
             <a:r>
               <a:rPr sz="1250" b="0">
@@ -8637,7 +8637,7 @@
                 <a:latin typeface="Times New Roman"/>
                 <a:ea typeface="宋体"/>
               </a:rPr>
-              <a:t>（3）同时具备 O + I + L 三大优势： </a:t>
+              <a:t>（3）同时具备 O + I + L 三大优势：</a:t>
             </a:r>
             <a:r>
               <a:rPr sz="1250" b="0">
@@ -8704,7 +8704,7 @@
                 <a:latin typeface="Times New Roman"/>
                 <a:ea typeface="宋体"/>
               </a:rPr>
-              <a:t>  ★ 核心要点：邓宁 OLI 理论为跨国企业判定何时出海、如何出海提供了最经典的理论决策分析框架。</a:t>
+              <a:t>★ 核心要点：邓宁 OLI 理论为跨国企业判定何时出海、如何出海提供了最经典的理论决策分析框架。</a:t>
             </a:r>
           </a:p>
         </p:txBody>
@@ -10338,7 +10338,7 @@
                 <a:latin typeface="Times New Roman"/>
                 <a:ea typeface="宋体"/>
               </a:rPr>
-              <a:t>  1. 绿地投资（Greenfield）vs 跨国并购（M&amp;A）</a:t>
+              <a:t>1. 绿地投资（Greenfield）vs 跨国并购（M&amp;A）</a:t>
             </a:r>
           </a:p>
         </p:txBody>
@@ -10381,7 +10381,7 @@
                 <a:latin typeface="Times New Roman"/>
                 <a:ea typeface="宋体"/>
               </a:rPr>
-              <a:t>（1）绿地投资（全新建厂）： </a:t>
+              <a:t>（1）绿地投资（全新建厂）：</a:t>
             </a:r>
             <a:r>
               <a:rPr sz="1250" b="0">
@@ -10411,7 +10411,7 @@
                 <a:latin typeface="Times New Roman"/>
                 <a:ea typeface="宋体"/>
               </a:rPr>
-              <a:t>（2）跨国并购（Cross-border M&amp;A）： </a:t>
+              <a:t>（2）跨国并购（Cross-border M&amp;A）：</a:t>
             </a:r>
             <a:r>
               <a:rPr sz="1250" b="0">
@@ -10521,7 +10521,7 @@
                 <a:latin typeface="Times New Roman"/>
                 <a:ea typeface="宋体"/>
               </a:rPr>
-              <a:t>  2. 案例11-2：阿里巴巴与中小企业全球化新平台（eWTP）</a:t>
+              <a:t>2. 案例11-2：阿里巴巴与中小企业全球化新平台（eWTP）</a:t>
             </a:r>
           </a:p>
         </p:txBody>
@@ -10564,7 +10564,7 @@
                 <a:latin typeface="Times New Roman"/>
                 <a:ea typeface="宋体"/>
               </a:rPr>
-              <a:t>（1）赋能全球中小微企业： </a:t>
+              <a:t>（1）赋能全球中小微企业：</a:t>
             </a:r>
             <a:r>
               <a:rPr sz="1250" b="0">
@@ -10594,7 +10594,7 @@
                 <a:latin typeface="Times New Roman"/>
                 <a:ea typeface="宋体"/>
               </a:rPr>
-              <a:t>（2）管理启示： </a:t>
+              <a:t>（2）管理启示：</a:t>
             </a:r>
             <a:r>
               <a:rPr sz="1250" b="0">
@@ -10661,7 +10661,7 @@
                 <a:latin typeface="Times New Roman"/>
                 <a:ea typeface="宋体"/>
               </a:rPr>
-              <a:t>  ★ 核心要点：全球化供应链的未来属于数字化、轻量化与高韧性，兼顾全球效率与本地化协同。</a:t>
+              <a:t>★ 核心要点：全球化供应链的未来属于数字化、轻量化与高韧性，兼顾全球效率与本地化协同。</a:t>
             </a:r>
           </a:p>
         </p:txBody>
@@ -12663,7 +12663,7 @@
                 <a:latin typeface="Times New Roman"/>
                 <a:ea typeface="宋体"/>
               </a:rPr>
-              <a:t>  1. 跨国公司全球组织架构四种经典模式</a:t>
+              <a:t>1. 跨国公司全球组织架构四种经典模式</a:t>
             </a:r>
           </a:p>
         </p:txBody>
@@ -12706,7 +12706,7 @@
                 <a:latin typeface="Times New Roman"/>
                 <a:ea typeface="宋体"/>
               </a:rPr>
-              <a:t>（1）国际事业部制（International Division）： </a:t>
+              <a:t>（1）国际事业部制（International Division）：</a:t>
             </a:r>
             <a:r>
               <a:rPr sz="1250" b="0">
@@ -12736,7 +12736,7 @@
                 <a:latin typeface="Times New Roman"/>
                 <a:ea typeface="宋体"/>
               </a:rPr>
-              <a:t>（2）全球产品事业部制（Global Product Division）： </a:t>
+              <a:t>（2）全球产品事业部制（Global Product Division）：</a:t>
             </a:r>
             <a:r>
               <a:rPr sz="1250" b="0">
@@ -12766,7 +12766,7 @@
                 <a:latin typeface="Times New Roman"/>
                 <a:ea typeface="宋体"/>
               </a:rPr>
-              <a:t>（3）全球区域事业部制（Global Area Division）： </a:t>
+              <a:t>（3）全球区域事业部制（Global Area Division）：</a:t>
             </a:r>
             <a:r>
               <a:rPr sz="1250" b="0">
@@ -12796,7 +12796,7 @@
                 <a:latin typeface="Times New Roman"/>
                 <a:ea typeface="宋体"/>
               </a:rPr>
-              <a:t>（4）全球矩阵式架构（Global Matrix Structure）： </a:t>
+              <a:t>（4）全球矩阵式架构（Global Matrix Structure）：</a:t>
             </a:r>
             <a:r>
               <a:rPr sz="1250" b="0">
@@ -12906,7 +12906,7 @@
                 <a:latin typeface="Times New Roman"/>
                 <a:ea typeface="宋体"/>
               </a:rPr>
-              <a:t>  2. 跨国组织治理的战略演进</a:t>
+              <a:t>2. 跨国组织治理的战略演进</a:t>
             </a:r>
           </a:p>
         </p:txBody>
@@ -12949,7 +12949,7 @@
                 <a:latin typeface="Times New Roman"/>
                 <a:ea typeface="宋体"/>
               </a:rPr>
-              <a:t>（1）从多国本土化走向全球整合跨国网络： </a:t>
+              <a:t>（1）从多国本土化走向全球整合跨国网络：</a:t>
             </a:r>
             <a:r>
               <a:rPr sz="1250" b="0">
@@ -13016,7 +13016,7 @@
                 <a:latin typeface="Times New Roman"/>
                 <a:ea typeface="宋体"/>
               </a:rPr>
-              <a:t>  ★ 核心要点：组织架构是跨国战略落地的骨架支撑，动态调整架构是驾驭复杂全球经营环境的根本保障。</a:t>
+              <a:t>★ 核心要点：组织架构是跨国战略落地的骨架支撑，动态调整架构是驾驭复杂全球经营环境的根本保障。</a:t>
             </a:r>
           </a:p>
         </p:txBody>
@@ -13423,7 +13423,7 @@
                 <a:latin typeface="Times New Roman"/>
                 <a:ea typeface="宋体"/>
               </a:rPr>
-              <a:t>  比较优势与新贸易理论</a:t>
+              <a:t>比较优势与新贸易理论</a:t>
             </a:r>
           </a:p>
         </p:txBody>
@@ -13627,7 +13627,7 @@
                 <a:latin typeface="Times New Roman"/>
                 <a:ea typeface="宋体"/>
               </a:rPr>
-              <a:t>  汇率波动与风险管理</a:t>
+              <a:t>汇率波动与风险管理</a:t>
             </a:r>
           </a:p>
         </p:txBody>
@@ -13831,7 +13831,7 @@
                 <a:latin typeface="Times New Roman"/>
                 <a:ea typeface="宋体"/>
               </a:rPr>
-              <a:t>  关税保护与死重损失</a:t>
+              <a:t>关税保护与死重损失</a:t>
             </a:r>
           </a:p>
         </p:txBody>
@@ -14035,7 +14035,7 @@
                 <a:latin typeface="Times New Roman"/>
                 <a:ea typeface="宋体"/>
               </a:rPr>
-              <a:t>  邓宁 OLI 与 FDI 模式</a:t>
+              <a:t>邓宁 OLI 与 FDI 模式</a:t>
             </a:r>
           </a:p>
         </p:txBody>
@@ -14196,7 +14196,7 @@
                 <a:latin typeface="Times New Roman"/>
                 <a:ea typeface="宋体"/>
               </a:rPr>
-              <a:t>  ★ 战略结语：全球化经营要求企业站在全球价值链的高度，统筹把握比较优势、跨国资本运作、汇率风险套保与本土化运营，开辟无国界的第二增长曲线。</a:t>
+              <a:t>★ 战略结语：全球化经营要求企业站在全球价值链的高度，统筹把握比较优势、跨国资本运作、汇率风险套保与本土化运营，开辟无国界的第二增长曲线。</a:t>
             </a:r>
           </a:p>
         </p:txBody>
@@ -14603,7 +14603,7 @@
                 <a:latin typeface="Times New Roman"/>
                 <a:ea typeface="宋体"/>
               </a:rPr>
-              <a:t>  课后复习思考题与 MBA 讨论案例（严格对应课本习题）</a:t>
+              <a:t>课后复习思考题与 MBA 讨论案例（严格对应课本习题）</a:t>
             </a:r>
           </a:p>
         </p:txBody>
@@ -14646,7 +14646,7 @@
                 <a:latin typeface="Times New Roman"/>
                 <a:ea typeface="宋体"/>
               </a:rPr>
-              <a:t>1. </a:t>
+              <a:t>1.</a:t>
             </a:r>
             <a:r>
               <a:rPr sz="1250" b="0">
@@ -14676,7 +14676,7 @@
                 <a:latin typeface="Times New Roman"/>
                 <a:ea typeface="宋体"/>
               </a:rPr>
-              <a:t>2. </a:t>
+              <a:t>2.</a:t>
             </a:r>
             <a:r>
               <a:rPr sz="1250" b="0">
@@ -14706,7 +14706,7 @@
                 <a:latin typeface="Times New Roman"/>
                 <a:ea typeface="宋体"/>
               </a:rPr>
-              <a:t>3. </a:t>
+              <a:t>3.</a:t>
             </a:r>
             <a:r>
               <a:rPr sz="1250" b="0">
@@ -14736,7 +14736,7 @@
                 <a:latin typeface="Times New Roman"/>
                 <a:ea typeface="宋体"/>
               </a:rPr>
-              <a:t>4. </a:t>
+              <a:t>4.</a:t>
             </a:r>
             <a:r>
               <a:rPr sz="1250" b="0">
@@ -14766,7 +14766,7 @@
                 <a:latin typeface="Times New Roman"/>
                 <a:ea typeface="宋体"/>
               </a:rPr>
-              <a:t>5. </a:t>
+              <a:t>5.</a:t>
             </a:r>
             <a:r>
               <a:rPr sz="1250" b="0">
@@ -14796,7 +14796,7 @@
                 <a:latin typeface="Times New Roman"/>
                 <a:ea typeface="宋体"/>
               </a:rPr>
-              <a:t>6. </a:t>
+              <a:t>6.</a:t>
             </a:r>
             <a:r>
               <a:rPr sz="1250" b="0">
@@ -15520,7 +15520,7 @@
                 <a:latin typeface="Times New Roman"/>
                 <a:ea typeface="宋体"/>
               </a:rPr>
-              <a:t>  1. 大卫·李嘉图比较优势原理（Comparative Advantage）</a:t>
+              <a:t>1. 大卫·李嘉图比较优势原理（Comparative Advantage）</a:t>
             </a:r>
           </a:p>
         </p:txBody>
@@ -15563,7 +15563,7 @@
                 <a:latin typeface="Times New Roman"/>
                 <a:ea typeface="宋体"/>
               </a:rPr>
-              <a:t>（1）理论核心突破： </a:t>
+              <a:t>（1）理论核心突破：</a:t>
             </a:r>
             <a:r>
               <a:rPr sz="1250" b="0">
@@ -15593,7 +15593,7 @@
                 <a:latin typeface="Times New Roman"/>
                 <a:ea typeface="宋体"/>
               </a:rPr>
-              <a:t>（2）黄金决策口诀： </a:t>
+              <a:t>（2）黄金决策口诀：</a:t>
             </a:r>
             <a:r>
               <a:rPr sz="1250" b="0">
@@ -15623,7 +15623,7 @@
                 <a:latin typeface="Times New Roman"/>
                 <a:ea typeface="宋体"/>
               </a:rPr>
-              <a:t>（3）机会成本度量： </a:t>
+              <a:t>（3）机会成本度量：</a:t>
             </a:r>
             <a:r>
               <a:rPr sz="1250" b="0">
@@ -15633,7 +15633,7 @@
                 <a:latin typeface="Times New Roman"/>
                 <a:ea typeface="宋体"/>
               </a:rPr>
-              <a:t>若 A 国生产 1 吨钢需放弃 2 吨布（成本为 2 布），B 国生产 1 吨钢需放弃 3 吨布（成本为 3 布） \implies A 国在产钢上具有比较优势！</a:t>
+              <a:t>若 A 国生产 1 吨钢需放弃 2 吨布（成本为 2 布），B 国生产 1 吨钢需放弃 3 吨布（成本为 3 布） ⇒ A 国在产钢上具有比较优势！</a:t>
             </a:r>
           </a:p>
         </p:txBody>
@@ -15733,7 +15733,7 @@
                 <a:latin typeface="Times New Roman"/>
                 <a:ea typeface="宋体"/>
               </a:rPr>
-              <a:t>  2. 生活中的经济学 11-1：保罗·艾伦打字与专职秘书分工</a:t>
+              <a:t>2. 生活中的经济学 11-1：保罗·艾伦打字与专职秘书分工</a:t>
             </a:r>
           </a:p>
         </p:txBody>
@@ -15776,7 +15776,7 @@
                 <a:latin typeface="Times New Roman"/>
                 <a:ea typeface="宋体"/>
               </a:rPr>
-              <a:t>（1）商业故事： </a:t>
+              <a:t>（1）商业故事：</a:t>
             </a:r>
             <a:r>
               <a:rPr sz="1250" b="0">
@@ -15806,7 +15806,7 @@
                 <a:latin typeface="Times New Roman"/>
                 <a:ea typeface="宋体"/>
               </a:rPr>
-              <a:t>（2）机会成本权衡： </a:t>
+              <a:t>（2）机会成本权衡：</a:t>
             </a:r>
             <a:r>
               <a:rPr sz="1250" b="0">
@@ -15836,7 +15836,7 @@
                 <a:latin typeface="Times New Roman"/>
                 <a:ea typeface="宋体"/>
               </a:rPr>
-              <a:t>（3）管理启示： </a:t>
+              <a:t>（3）管理启示：</a:t>
             </a:r>
             <a:r>
               <a:rPr sz="1250" b="0">
@@ -15903,7 +15903,7 @@
                 <a:latin typeface="Times New Roman"/>
                 <a:ea typeface="宋体"/>
               </a:rPr>
-              <a:t>  ★ 核心要点：比较优势原理是人类社会开展专业化分工、降低全社会运行成本最深刻的经济学逻辑。</a:t>
+              <a:t>★ 核心要点：比较优势原理是人类社会开展专业化分工、降低全社会运行成本最深刻的经济学逻辑。</a:t>
             </a:r>
           </a:p>
         </p:txBody>
@@ -16310,7 +16310,7 @@
                 <a:latin typeface="Times New Roman"/>
                 <a:ea typeface="宋体"/>
               </a:rPr>
-              <a:t>  1. 保罗·克鲁格曼新贸易理论（New Trade Theory）</a:t>
+              <a:t>1. 保罗·克鲁格曼新贸易理论（New Trade Theory）</a:t>
             </a:r>
           </a:p>
         </p:txBody>
@@ -16353,7 +16353,7 @@
                 <a:latin typeface="Times New Roman"/>
                 <a:ea typeface="宋体"/>
               </a:rPr>
-              <a:t>（1）解释现实谜题： </a:t>
+              <a:t>（1）解释现实谜题：</a:t>
             </a:r>
             <a:r>
               <a:rPr sz="1250" b="0">
@@ -16383,7 +16383,7 @@
                 <a:latin typeface="Times New Roman"/>
                 <a:ea typeface="宋体"/>
               </a:rPr>
-              <a:t>（2）两大理论支柱： </a:t>
+              <a:t>（2）两大理论支柱：</a:t>
             </a:r>
             <a:r>
               <a:rPr sz="1250" b="0">
@@ -16413,7 +16413,7 @@
                 <a:latin typeface="Times New Roman"/>
                 <a:ea typeface="宋体"/>
               </a:rPr>
-              <a:t>（3）战略贸易政策启示： </a:t>
+              <a:t>（3）战略贸易政策启示：</a:t>
             </a:r>
             <a:r>
               <a:rPr sz="1250" b="0">
@@ -16523,7 +16523,7 @@
                 <a:latin typeface="Times New Roman"/>
                 <a:ea typeface="宋体"/>
               </a:rPr>
-              <a:t>  2. 赫克歇尔-俄林要素禀赋理论（H-O 模型）</a:t>
+              <a:t>2. 赫克歇尔-俄林要素禀赋理论（H-O 模型）</a:t>
             </a:r>
           </a:p>
         </p:txBody>
@@ -16566,7 +16566,7 @@
                 <a:latin typeface="Times New Roman"/>
                 <a:ea typeface="宋体"/>
               </a:rPr>
-              <a:t>（1）要素禀赋决定比较优势： </a:t>
+              <a:t>（1）要素禀赋决定比较优势：</a:t>
             </a:r>
             <a:r>
               <a:rPr sz="1250" b="0">
@@ -16596,7 +16596,7 @@
                 <a:latin typeface="Times New Roman"/>
                 <a:ea typeface="宋体"/>
               </a:rPr>
-              <a:t>（2）全球产业链分工： </a:t>
+              <a:t>（2）全球产业链分工：</a:t>
             </a:r>
             <a:r>
               <a:rPr sz="1250" b="0">
@@ -16663,7 +16663,7 @@
                 <a:latin typeface="Times New Roman"/>
                 <a:ea typeface="宋体"/>
               </a:rPr>
-              <a:t>  ★ 核心要点：新贸易理论与要素禀赋理论共同勾勒了现代全球化产业链垂直与水平分工的全景拼图。</a:t>
+              <a:t>★ 核心要点：新贸易理论与要素禀赋理论共同勾勒了现代全球化产业链垂直与水平分工的全景拼图。</a:t>
             </a:r>
           </a:p>
         </p:txBody>
@@ -17070,7 +17070,7 @@
                 <a:latin typeface="Times New Roman"/>
                 <a:ea typeface="宋体"/>
               </a:rPr>
-              <a:t>  1. 钻石模型四大核心决定要素</a:t>
+              <a:t>1. 钻石模型四大核心决定要素</a:t>
             </a:r>
           </a:p>
         </p:txBody>
@@ -17113,7 +17113,7 @@
                 <a:latin typeface="Times New Roman"/>
                 <a:ea typeface="宋体"/>
               </a:rPr>
-              <a:t>（1）生产要素条件（Factor Conditions）： </a:t>
+              <a:t>（1）生产要素条件（Factor Conditions）：</a:t>
             </a:r>
             <a:r>
               <a:rPr sz="1250" b="0">
@@ -17143,7 +17143,7 @@
                 <a:latin typeface="Times New Roman"/>
                 <a:ea typeface="宋体"/>
               </a:rPr>
-              <a:t>（2）需求条件（Demand Conditions）： </a:t>
+              <a:t>（2）需求条件（Demand Conditions）：</a:t>
             </a:r>
             <a:r>
               <a:rPr sz="1250" b="0">
@@ -17173,7 +17173,7 @@
                 <a:latin typeface="Times New Roman"/>
                 <a:ea typeface="宋体"/>
               </a:rPr>
-              <a:t>（3）相关与支持性产业（Related &amp; Supporting）： </a:t>
+              <a:t>（3）相关与支持性产业（Related &amp; Supporting）：</a:t>
             </a:r>
             <a:r>
               <a:rPr sz="1250" b="0">
@@ -17203,7 +17203,7 @@
                 <a:latin typeface="Times New Roman"/>
                 <a:ea typeface="宋体"/>
               </a:rPr>
-              <a:t>（4）企业战略、结构与同业竞争： </a:t>
+              <a:t>（4）企业战略、结构与同业竞争：</a:t>
             </a:r>
             <a:r>
               <a:rPr sz="1250" b="0">
@@ -17313,7 +17313,7 @@
                 <a:latin typeface="Times New Roman"/>
                 <a:ea typeface="宋体"/>
               </a:rPr>
-              <a:t>  2. 政府与机会两大辅助变量</a:t>
+              <a:t>2. 政府与机会两大辅助变量</a:t>
             </a:r>
           </a:p>
         </p:txBody>
@@ -17356,7 +17356,7 @@
                 <a:latin typeface="Times New Roman"/>
                 <a:ea typeface="宋体"/>
               </a:rPr>
-              <a:t>（1）政府功能： </a:t>
+              <a:t>（1）政府功能：</a:t>
             </a:r>
             <a:r>
               <a:rPr sz="1250" b="0">
@@ -17386,7 +17386,7 @@
                 <a:latin typeface="Times New Roman"/>
                 <a:ea typeface="宋体"/>
               </a:rPr>
-              <a:t>（2）机会变动： </a:t>
+              <a:t>（2）机会变动：</a:t>
             </a:r>
             <a:r>
               <a:rPr sz="1250" b="0">
@@ -17453,7 +17453,7 @@
                 <a:latin typeface="Times New Roman"/>
                 <a:ea typeface="宋体"/>
               </a:rPr>
-              <a:t>  ★ 核心要点：波特钻石模型将国际贸易从成本价格战升华为国家与产业综合创新生态系统战。</a:t>
+              <a:t>★ 核心要点：波特钻石模型将国际贸易从成本价格战升华为国家与产业综合创新生态系统战。</a:t>
             </a:r>
           </a:p>
         </p:txBody>
@@ -18167,7 +18167,7 @@
                 <a:latin typeface="Times New Roman"/>
                 <a:ea typeface="宋体"/>
               </a:rPr>
-              <a:t>  1. 直接标价法与间接标价法</a:t>
+              <a:t>1. 直接标价法与间接标价法</a:t>
             </a:r>
           </a:p>
         </p:txBody>
@@ -18210,7 +18210,7 @@
                 <a:latin typeface="Times New Roman"/>
                 <a:ea typeface="宋体"/>
               </a:rPr>
-              <a:t>（1）直接标价法（Direct Quotation）： </a:t>
+              <a:t>（1）直接标价法（Direct Quotation）：</a:t>
             </a:r>
             <a:r>
               <a:rPr sz="1250" b="0">
@@ -18240,7 +18240,7 @@
                 <a:latin typeface="Times New Roman"/>
                 <a:ea typeface="宋体"/>
               </a:rPr>
-              <a:t>（2）间接标价法（Indirect Quotation）： </a:t>
+              <a:t>（2）间接标价法（Indirect Quotation）：</a:t>
             </a:r>
             <a:r>
               <a:rPr sz="1250" b="0">
@@ -18350,7 +18350,7 @@
                 <a:latin typeface="Times New Roman"/>
                 <a:ea typeface="宋体"/>
               </a:rPr>
-              <a:t>  2. 汇率升贬值对企业贸易收支的异向影响</a:t>
+              <a:t>2. 汇率升贬值对企业贸易收支的异向影响</a:t>
             </a:r>
           </a:p>
         </p:txBody>
@@ -18393,7 +18393,7 @@
                 <a:latin typeface="Times New Roman"/>
                 <a:ea typeface="宋体"/>
               </a:rPr>
-              <a:t>（1）本币贬值（如 7.0 \to 7.3）： </a:t>
+              <a:t>（1）本币贬值（如 7.0 → 7.3）：</a:t>
             </a:r>
             <a:r>
               <a:rPr sz="1250" b="0">
@@ -18423,7 +18423,7 @@
                 <a:latin typeface="Times New Roman"/>
                 <a:ea typeface="宋体"/>
               </a:rPr>
-              <a:t>（2）本币升值（如 7.0 \to 6.5）： </a:t>
+              <a:t>（2）本币升值（如 7.0 → 6.5）：</a:t>
             </a:r>
             <a:r>
               <a:rPr sz="1250" b="0">
@@ -18490,7 +18490,7 @@
                 <a:latin typeface="Times New Roman"/>
                 <a:ea typeface="宋体"/>
               </a:rPr>
-              <a:t>  ★ 核心要点：汇率波动是影响外贸企业利润最直接的宏观价格杠杆，建立汇率弹性敏捷定价机制至关重要。</a:t>
+              <a:t>★ 核心要点：汇率波动是影响外贸企业利润最直接的宏观价格杠杆，建立汇率弹性敏捷定价机制至关重要。</a:t>
             </a:r>
           </a:p>
         </p:txBody>
@@ -18897,7 +18897,7 @@
                 <a:latin typeface="Times New Roman"/>
                 <a:ea typeface="宋体"/>
               </a:rPr>
-              <a:t>  1. 跨国企业面临的三大汇率风险分类</a:t>
+              <a:t>1. 跨国企业面临的三大汇率风险分类</a:t>
             </a:r>
           </a:p>
         </p:txBody>
@@ -18940,7 +18940,7 @@
                 <a:latin typeface="Times New Roman"/>
                 <a:ea typeface="宋体"/>
               </a:rPr>
-              <a:t>（1）交易风险（Transaction Risk / 短期）： </a:t>
+              <a:t>（1）交易风险（Transaction Risk / 短期）：</a:t>
             </a:r>
             <a:r>
               <a:rPr sz="1250" b="0">
@@ -18970,7 +18970,7 @@
                 <a:latin typeface="Times New Roman"/>
                 <a:ea typeface="宋体"/>
               </a:rPr>
-              <a:t>（2）折算风险（Translation Risk / 会计风险）： </a:t>
+              <a:t>（2）折算风险（Translation Risk / 会计风险）：</a:t>
             </a:r>
             <a:r>
               <a:rPr sz="1250" b="0">
@@ -19000,7 +19000,7 @@
                 <a:latin typeface="Times New Roman"/>
                 <a:ea typeface="宋体"/>
               </a:rPr>
-              <a:t>（3）经济风险（Economic Risk / 长期战略风险）： </a:t>
+              <a:t>（3）经济风险（Economic Risk / 长期战略风险）：</a:t>
             </a:r>
             <a:r>
               <a:rPr sz="1250" b="0">
@@ -19110,7 +19110,7 @@
                 <a:latin typeface="Times New Roman"/>
                 <a:ea typeface="宋体"/>
               </a:rPr>
-              <a:t>  2. 金融衍生品与供应链自然对冲工具</a:t>
+              <a:t>2. 金融衍生品与供应链自然对冲工具</a:t>
             </a:r>
           </a:p>
         </p:txBody>
@@ -19153,7 +19153,7 @@
                 <a:latin typeface="Times New Roman"/>
                 <a:ea typeface="宋体"/>
               </a:rPr>
-              <a:t>（1）远期外汇合约（Forward Contract）： </a:t>
+              <a:t>（1）远期外汇合约（Forward Contract）：</a:t>
             </a:r>
             <a:r>
               <a:rPr sz="1250" b="0">
@@ -19183,7 +19183,7 @@
                 <a:latin typeface="Times New Roman"/>
                 <a:ea typeface="宋体"/>
               </a:rPr>
-              <a:t>（2）外汇期权（Currency Options）： </a:t>
+              <a:t>（2）外汇期权（Currency Options）：</a:t>
             </a:r>
             <a:r>
               <a:rPr sz="1250" b="0">
@@ -19213,7 +19213,7 @@
                 <a:latin typeface="Times New Roman"/>
                 <a:ea typeface="宋体"/>
               </a:rPr>
-              <a:t>（3）全球多币种产销平衡自然对冲： </a:t>
+              <a:t>（3）全球多币种产销平衡自然对冲：</a:t>
             </a:r>
             <a:r>
               <a:rPr sz="1250" b="0">
@@ -19280,7 +19280,7 @@
                 <a:latin typeface="Times New Roman"/>
                 <a:ea typeface="宋体"/>
               </a:rPr>
-              <a:t>  ★ 核心要点：汇率风险管理是跨国企业出海的第一必修课，必须坚持'风险中性'原则，杜绝单边外汇投机。</a:t>
+              <a:t>★ 核心要点：汇率风险管理是跨国企业出海的第一必修课，必须坚持'风险中性'原则，杜绝单边外汇投机。</a:t>
             </a:r>
           </a:p>
         </p:txBody>
